--- a/docs/decks/ShockFlow_AI_CTO_review.pptx
+++ b/docs/decks/ShockFlow_AI_CTO_review.pptx
@@ -9290,8 +9290,8 @@
         </p:nvSpPr>
         <p:spPr>
           <a:xfrm>
-            <a:off x="457200" y="6172200"/>
-            <a:ext cx="10972800" cy="274320"/>
+            <a:off x="457200" y="6108192"/>
+            <a:ext cx="10972800" cy="256032"/>
           </a:xfrm>
           <a:prstGeom prst="rect">
             <a:avLst/>
@@ -9324,6 +9324,59 @@
       <p:sp>
         <p:nvSpPr>
           <p:cNvPr id="31" name="Text 29"/>
+          <p:cNvSpPr/>
+          <p:nvPr/>
+        </p:nvSpPr>
+        <p:spPr>
+          <a:xfrm>
+            <a:off x="457200" y="6345936"/>
+            <a:ext cx="11247120" cy="219456"/>
+          </a:xfrm>
+          <a:prstGeom prst="rect">
+            <a:avLst/>
+          </a:prstGeom>
+          <a:noFill/>
+          <a:ln/>
+        </p:spPr>
+        <p:txBody>
+          <a:bodyPr wrap="square" lIns="0" tIns="0" rIns="0" bIns="0" rtlCol="0" anchor="ctr"/>
+          <a:lstStyle/>
+          <a:p>
+            <a:pPr algn="l" indent="0" marL="0">
+              <a:buNone/>
+            </a:pPr>
+            <a:r>
+              <a:rPr lang="en-US" sz="850" b="1" dirty="0">
+                <a:solidFill>
+                  <a:srgbClr val="F5A02B"/>
+                </a:solidFill>
+                <a:latin typeface="Courier New" pitchFamily="34" charset="0"/>
+                <a:ea typeface="Courier New" pitchFamily="34" charset="-122"/>
+                <a:cs typeface="Courier New" pitchFamily="34" charset="-120"/>
+              </a:rPr>
+              <a:t>용어  </a:t>
+            </a:r>
+            <a:pPr algn="l" indent="0" marL="0">
+              <a:buNone/>
+            </a:pPr>
+            <a:r>
+              <a:rPr lang="en-US" sz="850" dirty="0">
+                <a:solidFill>
+                  <a:srgbClr val="7E8DA8"/>
+                </a:solidFill>
+                <a:latin typeface="Calibri" pitchFamily="34" charset="0"/>
+                <a:ea typeface="Calibri" pitchFamily="34" charset="-122"/>
+                <a:cs typeface="Calibri" pitchFamily="34" charset="-120"/>
+              </a:rPr>
+              <a:t>H3 zone = 동네 블록 단위(육각 격자 res 9, ~170 m) · borough = 뉴욕 자치구(시 행정구역)</a:t>
+            </a:r>
+            <a:endParaRPr lang="en-US" sz="850" dirty="0"/>
+          </a:p>
+        </p:txBody>
+      </p:sp>
+      <p:sp>
+        <p:nvSpPr>
+          <p:cNvPr id="32" name="Text 30"/>
           <p:cNvSpPr/>
           <p:nvPr/>
         </p:nvSpPr>
